--- a/暑期實習進度報告/08.06.pptx
+++ b/暑期實習進度報告/08.06.pptx
@@ -211,7 +211,7 @@
           <a:p>
             <a:fld id="{D54B67A6-86C8-4AEC-8A8F-6C2F464F56C5}" type="datetimeFigureOut">
               <a:rPr lang="zh-TW" altLang="en-US" smtClean="0"/>
-              <a:t>2026/8/5</a:t>
+              <a:t>2026/8/6</a:t>
             </a:fld>
             <a:endParaRPr lang="zh-TW" altLang="en-US"/>
           </a:p>
@@ -1338,7 +1338,7 @@
           <a:p>
             <a:fld id="{7E37C305-5696-4A7F-86AE-9C076744B4EA}" type="datetime1">
               <a:rPr lang="zh-TW" altLang="en-US" smtClean="0"/>
-              <a:t>2026/8/5</a:t>
+              <a:t>2026/8/6</a:t>
             </a:fld>
             <a:endParaRPr lang="zh-TW" altLang="en-US"/>
           </a:p>
@@ -1683,7 +1683,7 @@
           <a:p>
             <a:fld id="{3E0432D5-B03D-4717-A904-795F862C1E5D}" type="datetime1">
               <a:rPr lang="zh-TW" altLang="en-US" smtClean="0"/>
-              <a:t>2026/8/5</a:t>
+              <a:t>2026/8/6</a:t>
             </a:fld>
             <a:endParaRPr lang="zh-TW" altLang="en-US"/>
           </a:p>
@@ -2084,7 +2084,7 @@
           <a:p>
             <a:fld id="{2525C8B2-1CA8-4214-9C14-3CAA749726CE}" type="datetime1">
               <a:rPr lang="zh-TW" altLang="en-US" smtClean="0"/>
-              <a:t>2026/8/5</a:t>
+              <a:t>2026/8/6</a:t>
             </a:fld>
             <a:endParaRPr lang="zh-TW" altLang="en-US"/>
           </a:p>
@@ -2420,7 +2420,7 @@
           <a:p>
             <a:fld id="{E78A667E-6D94-4A33-B267-6660FFC03615}" type="datetime1">
               <a:rPr lang="zh-TW" altLang="en-US" smtClean="0"/>
-              <a:t>2026/8/5</a:t>
+              <a:t>2026/8/6</a:t>
             </a:fld>
             <a:endParaRPr lang="zh-TW" altLang="en-US"/>
           </a:p>
@@ -2740,7 +2740,7 @@
           <a:p>
             <a:fld id="{6652C43B-7B97-41B4-A0D9-48858736EFA4}" type="datetime1">
               <a:rPr lang="zh-TW" altLang="en-US" smtClean="0"/>
-              <a:t>2026/8/5</a:t>
+              <a:t>2026/8/6</a:t>
             </a:fld>
             <a:endParaRPr lang="zh-TW" altLang="en-US"/>
           </a:p>
@@ -3136,7 +3136,7 @@
           <a:p>
             <a:fld id="{569EF5B8-0A25-46D3-80D8-0863E07A873E}" type="datetime1">
               <a:rPr lang="zh-TW" altLang="en-US" smtClean="0"/>
-              <a:t>2026/8/5</a:t>
+              <a:t>2026/8/6</a:t>
             </a:fld>
             <a:endParaRPr lang="zh-TW" altLang="en-US"/>
           </a:p>
@@ -3393,7 +3393,7 @@
           <a:p>
             <a:fld id="{07D5B9F2-24E4-479E-A18C-BF8EB1ED4286}" type="datetime1">
               <a:rPr lang="zh-TW" altLang="en-US" smtClean="0"/>
-              <a:t>2026/8/5</a:t>
+              <a:t>2026/8/6</a:t>
             </a:fld>
             <a:endParaRPr lang="zh-TW" altLang="en-US"/>
           </a:p>
@@ -3655,7 +3655,7 @@
           <a:p>
             <a:fld id="{F11E6E13-70FA-486A-9C9C-12B2AF2AEAF1}" type="datetime1">
               <a:rPr lang="zh-TW" altLang="en-US" smtClean="0"/>
-              <a:t>2026/8/5</a:t>
+              <a:t>2026/8/6</a:t>
             </a:fld>
             <a:endParaRPr lang="zh-TW" altLang="en-US"/>
           </a:p>
@@ -3917,7 +3917,7 @@
           <a:p>
             <a:fld id="{BA9150FA-4614-4BF5-8794-75F97A0B2544}" type="datetime1">
               <a:rPr lang="zh-TW" altLang="en-US" smtClean="0"/>
-              <a:t>2026/8/5</a:t>
+              <a:t>2026/8/6</a:t>
             </a:fld>
             <a:endParaRPr lang="zh-TW" altLang="en-US"/>
           </a:p>
@@ -4246,7 +4246,7 @@
           <a:p>
             <a:fld id="{63D336E6-5EE0-4A71-81C3-454B5C7B8BFB}" type="datetime1">
               <a:rPr lang="zh-TW" altLang="en-US" smtClean="0"/>
-              <a:t>2026/8/5</a:t>
+              <a:t>2026/8/6</a:t>
             </a:fld>
             <a:endParaRPr lang="zh-TW" altLang="en-US"/>
           </a:p>
@@ -4569,7 +4569,7 @@
           <a:p>
             <a:fld id="{A477ED53-FC9D-48CB-AA63-3CC0B044F3C0}" type="datetime1">
               <a:rPr lang="zh-TW" altLang="en-US" smtClean="0"/>
-              <a:t>2026/8/5</a:t>
+              <a:t>2026/8/6</a:t>
             </a:fld>
             <a:endParaRPr lang="zh-TW" altLang="en-US"/>
           </a:p>
@@ -5026,7 +5026,7 @@
           <a:p>
             <a:fld id="{F37D8557-2EF5-4AB0-8FDE-59BF801865CC}" type="datetime1">
               <a:rPr lang="zh-TW" altLang="en-US" smtClean="0"/>
-              <a:t>2026/8/5</a:t>
+              <a:t>2026/8/6</a:t>
             </a:fld>
             <a:endParaRPr lang="zh-TW" altLang="en-US"/>
           </a:p>
@@ -5231,7 +5231,7 @@
           <a:p>
             <a:fld id="{3FABEE1F-4E42-4556-91FB-8362A0311142}" type="datetime1">
               <a:rPr lang="zh-TW" altLang="en-US" smtClean="0"/>
-              <a:t>2026/8/5</a:t>
+              <a:t>2026/8/6</a:t>
             </a:fld>
             <a:endParaRPr lang="zh-TW" altLang="en-US"/>
           </a:p>
@@ -5408,7 +5408,7 @@
           <a:p>
             <a:fld id="{24E9E288-AC8B-4B62-B049-7671F3A2DFF0}" type="datetime1">
               <a:rPr lang="zh-TW" altLang="en-US" smtClean="0"/>
-              <a:t>2026/8/5</a:t>
+              <a:t>2026/8/6</a:t>
             </a:fld>
             <a:endParaRPr lang="zh-TW" altLang="en-US"/>
           </a:p>
@@ -5741,7 +5741,7 @@
           <a:p>
             <a:fld id="{90C82A0F-D946-4FC0-8D63-AF5246A679AE}" type="datetime1">
               <a:rPr lang="zh-TW" altLang="en-US" smtClean="0"/>
-              <a:t>2026/8/5</a:t>
+              <a:t>2026/8/6</a:t>
             </a:fld>
             <a:endParaRPr lang="zh-TW" altLang="en-US"/>
           </a:p>
@@ -6086,7 +6086,7 @@
           <a:p>
             <a:fld id="{E61BBE9F-1777-4CD2-896A-5CE0FA3014FF}" type="datetime1">
               <a:rPr lang="zh-TW" altLang="en-US" smtClean="0"/>
-              <a:t>2026/8/5</a:t>
+              <a:t>2026/8/6</a:t>
             </a:fld>
             <a:endParaRPr lang="zh-TW" altLang="en-US"/>
           </a:p>
@@ -8378,7 +8378,7 @@
           <a:p>
             <a:fld id="{A84D7AFE-6A4C-47D2-A958-3F76A70AFF87}" type="datetime1">
               <a:rPr lang="zh-TW" altLang="en-US" smtClean="0"/>
-              <a:t>2026/8/5</a:t>
+              <a:t>2026/8/6</a:t>
             </a:fld>
             <a:endParaRPr lang="zh-TW" altLang="en-US"/>
           </a:p>
@@ -8954,7 +8954,7 @@
           <a:p>
             <a:r>
               <a:rPr lang="en-US" altLang="zh-TW" dirty="0"/>
-              <a:t>07.27</a:t>
+              <a:t>08.06</a:t>
             </a:r>
             <a:endParaRPr lang="zh-TW" altLang="en-US" dirty="0"/>
           </a:p>

--- a/暑期實習進度報告/08.06.pptx
+++ b/暑期實習進度報告/08.06.pptx
@@ -524,11 +524,176 @@
           <a:p>
             <a:r>
               <a:rPr lang="en-US" altLang="zh-TW" dirty="0"/>
+              <a:t>Enrichment</a:t>
+            </a:r>
+            <a:r>
+              <a:rPr lang="zh-TW" altLang="en-US" dirty="0"/>
+              <a:t>要做的多詳細</a:t>
+            </a:r>
+            <a:r>
+              <a:rPr lang="en-US" altLang="zh-TW"/>
+              <a:t>?</a:t>
+            </a:r>
+            <a:endParaRPr lang="en-US" altLang="zh-TW" dirty="0"/>
+          </a:p>
+        </p:txBody>
+      </p:sp>
+      <p:sp>
+        <p:nvSpPr>
+          <p:cNvPr id="4" name="投影片編號版面配置區 3"/>
+          <p:cNvSpPr>
+            <a:spLocks noGrp="1"/>
+          </p:cNvSpPr>
+          <p:nvPr>
+            <p:ph type="sldNum" sz="quarter" idx="5"/>
+          </p:nvPr>
+        </p:nvSpPr>
+        <p:spPr/>
+        <p:txBody>
+          <a:bodyPr/>
+          <a:lstStyle/>
+          <a:p>
+            <a:fld id="{D307B5DF-8346-47E0-A838-EF3629E0D137}" type="slidenum">
+              <a:rPr lang="zh-TW" altLang="en-US" smtClean="0"/>
+              <a:t>5</a:t>
+            </a:fld>
+            <a:endParaRPr lang="zh-TW" altLang="en-US"/>
+          </a:p>
+        </p:txBody>
+      </p:sp>
+    </p:spTree>
+    <p:extLst>
+      <p:ext uri="{BB962C8B-B14F-4D97-AF65-F5344CB8AC3E}">
+        <p14:creationId xmlns:p14="http://schemas.microsoft.com/office/powerpoint/2010/main" val="1852751529"/>
+      </p:ext>
+    </p:extLst>
+  </p:cSld>
+  <p:clrMapOvr>
+    <a:masterClrMapping/>
+  </p:clrMapOvr>
+</p:notes>
+</file>
+
+<file path=ppt/notesSlides/notesSlide2.xml><?xml version="1.0" encoding="utf-8"?>
+<p:notes xmlns:a="http://schemas.openxmlformats.org/drawingml/2006/main" xmlns:r="http://schemas.openxmlformats.org/officeDocument/2006/relationships" xmlns:p="http://schemas.openxmlformats.org/presentationml/2006/main">
+  <p:cSld>
+    <p:spTree>
+      <p:nvGrpSpPr>
+        <p:cNvPr id="1" name=""/>
+        <p:cNvGrpSpPr/>
+        <p:nvPr/>
+      </p:nvGrpSpPr>
+      <p:grpSpPr>
+        <a:xfrm>
+          <a:off x="0" y="0"/>
+          <a:ext cx="0" cy="0"/>
+          <a:chOff x="0" y="0"/>
+          <a:chExt cx="0" cy="0"/>
+        </a:xfrm>
+      </p:grpSpPr>
+      <p:sp>
+        <p:nvSpPr>
+          <p:cNvPr id="2" name="投影片影像版面配置區 1"/>
+          <p:cNvSpPr>
+            <a:spLocks noGrp="1" noRot="1" noChangeAspect="1"/>
+          </p:cNvSpPr>
+          <p:nvPr>
+            <p:ph type="sldImg"/>
+          </p:nvPr>
+        </p:nvSpPr>
+        <p:spPr/>
+      </p:sp>
+      <p:sp>
+        <p:nvSpPr>
+          <p:cNvPr id="3" name="備忘稿版面配置區 2"/>
+          <p:cNvSpPr>
+            <a:spLocks noGrp="1"/>
+          </p:cNvSpPr>
+          <p:nvPr>
+            <p:ph type="body" idx="1"/>
+          </p:nvPr>
+        </p:nvSpPr>
+        <p:spPr/>
+        <p:txBody>
+          <a:bodyPr/>
+          <a:lstStyle/>
+          <a:p>
+            <a:r>
+              <a:rPr lang="en-US" altLang="zh-TW" dirty="0"/>
               <a:t>Image source : </a:t>
             </a:r>
             <a:r>
               <a:rPr lang="en-US" altLang="zh-TW" dirty="0" err="1"/>
               <a:t>pngtree</a:t>
+            </a:r>
+            <a:endParaRPr lang="en-US" altLang="zh-TW" dirty="0"/>
+          </a:p>
+          <a:p>
+            <a:endParaRPr lang="en-US" altLang="zh-TW" dirty="0"/>
+          </a:p>
+          <a:p>
+            <a:r>
+              <a:rPr lang="en-US" altLang="zh-TW" dirty="0"/>
+              <a:t>Cell type </a:t>
+            </a:r>
+            <a:r>
+              <a:rPr lang="zh-TW" altLang="en-US" dirty="0"/>
+              <a:t>不完整</a:t>
+            </a:r>
+            <a:endParaRPr lang="en-US" altLang="zh-TW" dirty="0"/>
+          </a:p>
+          <a:p>
+            <a:endParaRPr lang="en-US" altLang="zh-TW" dirty="0"/>
+          </a:p>
+          <a:p>
+            <a:r>
+              <a:rPr lang="zh-TW" altLang="en-US" dirty="0"/>
+              <a:t>看一下</a:t>
+            </a:r>
+            <a:r>
+              <a:rPr lang="en-US" altLang="zh-TW" dirty="0"/>
+              <a:t>mock</a:t>
+            </a:r>
+            <a:r>
+              <a:rPr lang="zh-TW" altLang="en-US" dirty="0"/>
+              <a:t>的</a:t>
+            </a:r>
+            <a:r>
+              <a:rPr lang="en-US" altLang="zh-TW" dirty="0" err="1"/>
+              <a:t>vt</a:t>
+            </a:r>
+            <a:r>
+              <a:rPr lang="en-US" altLang="zh-TW" dirty="0"/>
+              <a:t> distribution</a:t>
+            </a:r>
+          </a:p>
+          <a:p>
+            <a:endParaRPr lang="en-US" altLang="zh-TW" dirty="0"/>
+          </a:p>
+          <a:p>
+            <a:r>
+              <a:rPr lang="en-US" altLang="zh-TW" dirty="0"/>
+              <a:t>1dpi</a:t>
+            </a:r>
+            <a:r>
+              <a:rPr lang="zh-TW" altLang="en-US" dirty="0"/>
+              <a:t> </a:t>
+            </a:r>
+            <a:r>
+              <a:rPr lang="en-US" altLang="zh-TW" dirty="0" err="1"/>
+              <a:t>vt</a:t>
+            </a:r>
+            <a:r>
+              <a:rPr lang="en-US" altLang="zh-TW" dirty="0"/>
+              <a:t> = 0</a:t>
+            </a:r>
+            <a:r>
+              <a:rPr lang="zh-TW" altLang="en-US" dirty="0"/>
+              <a:t> 當作</a:t>
+            </a:r>
+            <a:r>
+              <a:rPr lang="en-US" altLang="zh-TW" dirty="0"/>
+              <a:t>healthy</a:t>
             </a:r>
             <a:endParaRPr lang="zh-TW" altLang="en-US" dirty="0"/>
           </a:p>
@@ -570,7 +735,7 @@
 </p:notes>
 </file>
 
-<file path=ppt/notesSlides/notesSlide2.xml><?xml version="1.0" encoding="utf-8"?>
+<file path=ppt/notesSlides/notesSlide3.xml><?xml version="1.0" encoding="utf-8"?>
 <p:notes xmlns:a="http://schemas.openxmlformats.org/drawingml/2006/main" xmlns:r="http://schemas.openxmlformats.org/officeDocument/2006/relationships" xmlns:p="http://schemas.openxmlformats.org/presentationml/2006/main">
   <p:cSld>
     <p:spTree>
@@ -640,6 +805,41 @@
               <a:rPr lang="en-US" altLang="zh-TW" dirty="0" err="1"/>
               <a:t>pngtree</a:t>
             </a:r>
+            <a:endParaRPr lang="en-US" altLang="zh-TW" dirty="0"/>
+          </a:p>
+          <a:p>
+            <a:r>
+              <a:rPr lang="zh-TW" altLang="en-US" dirty="0"/>
+              <a:t>確認</a:t>
+            </a:r>
+            <a:r>
+              <a:rPr lang="en-US" altLang="zh-TW" dirty="0"/>
+              <a:t>3000</a:t>
+            </a:r>
+            <a:r>
+              <a:rPr lang="zh-TW" altLang="en-US" dirty="0"/>
+              <a:t>個基因是不是都有包含</a:t>
+            </a:r>
+            <a:r>
+              <a:rPr lang="en-US" altLang="zh-TW" dirty="0"/>
+              <a:t>virus</a:t>
+            </a:r>
+            <a:r>
+              <a:rPr lang="zh-TW" altLang="en-US" dirty="0"/>
+              <a:t> </a:t>
+            </a:r>
+            <a:r>
+              <a:rPr lang="en-US" altLang="zh-TW" dirty="0"/>
+              <a:t>gene(</a:t>
+            </a:r>
+            <a:r>
+              <a:rPr lang="zh-TW" altLang="en-US" dirty="0"/>
+              <a:t>可能有</a:t>
+            </a:r>
+            <a:r>
+              <a:rPr lang="en-US" altLang="zh-TW" dirty="0"/>
+              <a:t>confounding)</a:t>
+            </a:r>
             <a:endParaRPr lang="zh-TW" altLang="en-US" dirty="0"/>
           </a:p>
         </p:txBody>
@@ -686,7 +886,7 @@
 </p:notes>
 </file>
 
-<file path=ppt/notesSlides/notesSlide3.xml><?xml version="1.0" encoding="utf-8"?>
+<file path=ppt/notesSlides/notesSlide4.xml><?xml version="1.0" encoding="utf-8"?>
 <p:notes xmlns:a="http://schemas.openxmlformats.org/drawingml/2006/main" xmlns:r="http://schemas.openxmlformats.org/officeDocument/2006/relationships" xmlns:p="http://schemas.openxmlformats.org/presentationml/2006/main">
   <p:cSld>
     <p:spTree>
@@ -802,7 +1002,7 @@
 </p:notes>
 </file>
 
-<file path=ppt/notesSlides/notesSlide4.xml><?xml version="1.0" encoding="utf-8"?>
+<file path=ppt/notesSlides/notesSlide5.xml><?xml version="1.0" encoding="utf-8"?>
 <p:notes xmlns:a="http://schemas.openxmlformats.org/drawingml/2006/main" xmlns:r="http://schemas.openxmlformats.org/officeDocument/2006/relationships" xmlns:p="http://schemas.openxmlformats.org/presentationml/2006/main">
   <p:cSld>
     <p:spTree>
@@ -918,7 +1118,7 @@
 </p:notes>
 </file>
 
-<file path=ppt/notesSlides/notesSlide5.xml><?xml version="1.0" encoding="utf-8"?>
+<file path=ppt/notesSlides/notesSlide6.xml><?xml version="1.0" encoding="utf-8"?>
 <p:notes xmlns:a="http://schemas.openxmlformats.org/drawingml/2006/main" xmlns:r="http://schemas.openxmlformats.org/officeDocument/2006/relationships" xmlns:p="http://schemas.openxmlformats.org/presentationml/2006/main">
   <p:cSld>
     <p:spTree>
@@ -1034,7 +1234,7 @@
 </p:notes>
 </file>
 
-<file path=ppt/notesSlides/notesSlide6.xml><?xml version="1.0" encoding="utf-8"?>
+<file path=ppt/notesSlides/notesSlide7.xml><?xml version="1.0" encoding="utf-8"?>
 <p:notes xmlns:a="http://schemas.openxmlformats.org/drawingml/2006/main" xmlns:r="http://schemas.openxmlformats.org/officeDocument/2006/relationships" xmlns:p="http://schemas.openxmlformats.org/presentationml/2006/main">
   <p:cSld>
     <p:spTree>
@@ -1104,7 +1304,33 @@
               <a:rPr lang="en-US" altLang="zh-TW" dirty="0" err="1"/>
               <a:t>pngtree</a:t>
             </a:r>
-            <a:endParaRPr lang="zh-TW" altLang="en-US" dirty="0"/>
+            <a:endParaRPr lang="en-US" altLang="zh-TW" dirty="0"/>
+          </a:p>
+          <a:p>
+            <a:r>
+              <a:rPr lang="en-US" altLang="zh-TW" dirty="0"/>
+              <a:t>1</a:t>
+            </a:r>
+            <a:r>
+              <a:rPr lang="zh-TW" altLang="en-US" dirty="0"/>
+              <a:t> </a:t>
+            </a:r>
+            <a:r>
+              <a:rPr lang="en-US" altLang="zh-TW" dirty="0"/>
+              <a:t>~</a:t>
+            </a:r>
+            <a:r>
+              <a:rPr lang="zh-TW" altLang="en-US" dirty="0"/>
+              <a:t> </a:t>
+            </a:r>
+            <a:r>
+              <a:rPr lang="en-US" altLang="zh-TW" dirty="0"/>
+              <a:t>9</a:t>
+            </a:r>
+            <a:r>
+              <a:rPr lang="zh-TW" altLang="en-US" dirty="0"/>
+              <a:t>要去看生物意義</a:t>
+            </a:r>
           </a:p>
         </p:txBody>
       </p:sp>
@@ -8953,7 +9179,7 @@
           <a:lstStyle/>
           <a:p>
             <a:r>
-              <a:rPr lang="en-US" altLang="zh-TW" dirty="0"/>
+              <a:rPr lang="en-US" altLang="zh-TW"/>
               <a:t>08.06</a:t>
             </a:r>
             <a:endParaRPr lang="zh-TW" altLang="en-US" dirty="0"/>
@@ -19861,7 +20087,7 @@
         </p:blipFill>
         <p:spPr>
           <a:xfrm>
-            <a:off x="5406620" y="2637183"/>
+            <a:off x="5513235" y="4515540"/>
             <a:ext cx="1233519" cy="1068130"/>
           </a:xfrm>
           <a:prstGeom prst="rect">
@@ -20147,7 +20373,7 @@
         </p:blipFill>
         <p:spPr>
           <a:xfrm>
-            <a:off x="5334035" y="4519844"/>
+            <a:off x="5385962" y="2590944"/>
             <a:ext cx="1418136" cy="1066064"/>
           </a:xfrm>
           <a:prstGeom prst="rect">

--- a/暑期實習進度報告/08.06.pptx
+++ b/暑期實習進度報告/08.06.pptx
@@ -211,7 +211,7 @@
           <a:p>
             <a:fld id="{D54B67A6-86C8-4AEC-8A8F-6C2F464F56C5}" type="datetimeFigureOut">
               <a:rPr lang="zh-TW" altLang="en-US" smtClean="0"/>
-              <a:t>2026/8/6</a:t>
+              <a:t>2026/8/10</a:t>
             </a:fld>
             <a:endParaRPr lang="zh-TW" altLang="en-US"/>
           </a:p>
@@ -638,7 +638,13 @@
             </a:r>
             <a:r>
               <a:rPr lang="zh-TW" altLang="en-US" dirty="0"/>
-              <a:t>不完整</a:t>
+              <a:t>不完整 </a:t>
+            </a:r>
+            <a:r>
+              <a:rPr lang="zh-TW" altLang="en-US" dirty="0">
+                <a:sym typeface="Wingdings 2" panose="05020102010507070707" pitchFamily="18" charset="2"/>
+              </a:rPr>
+              <a:t></a:t>
             </a:r>
             <a:endParaRPr lang="en-US" altLang="zh-TW" dirty="0"/>
           </a:p>
@@ -646,6 +652,23 @@
             <a:endParaRPr lang="en-US" altLang="zh-TW" dirty="0"/>
           </a:p>
           <a:p>
+            <a:pPr marL="0" marR="0" lvl="0" indent="0" algn="l" defTabSz="914400" rtl="0" eaLnBrk="1" fontAlgn="auto" latinLnBrk="0" hangingPunct="1">
+              <a:lnSpc>
+                <a:spcPct val="100000"/>
+              </a:lnSpc>
+              <a:spcBef>
+                <a:spcPts val="0"/>
+              </a:spcBef>
+              <a:spcAft>
+                <a:spcPts val="0"/>
+              </a:spcAft>
+              <a:buClrTx/>
+              <a:buSzTx/>
+              <a:buFontTx/>
+              <a:buNone/>
+              <a:tabLst/>
+              <a:defRPr/>
+            </a:pPr>
             <a:r>
               <a:rPr lang="zh-TW" altLang="en-US" dirty="0"/>
               <a:t>看一下</a:t>
@@ -666,11 +689,39 @@
               <a:rPr lang="en-US" altLang="zh-TW" dirty="0"/>
               <a:t> distribution</a:t>
             </a:r>
-          </a:p>
-          <a:p>
+            <a:r>
+              <a:rPr lang="zh-TW" altLang="en-US" dirty="0"/>
+              <a:t> </a:t>
+            </a:r>
+            <a:r>
+              <a:rPr lang="zh-TW" altLang="en-US" dirty="0">
+                <a:sym typeface="Wingdings 2" panose="05020102010507070707" pitchFamily="18" charset="2"/>
+              </a:rPr>
+              <a:t></a:t>
+            </a:r>
             <a:endParaRPr lang="en-US" altLang="zh-TW" dirty="0"/>
           </a:p>
           <a:p>
+            <a:endParaRPr lang="en-US" altLang="zh-TW" dirty="0"/>
+          </a:p>
+          <a:p>
+            <a:pPr marL="0" marR="0" lvl="0" indent="0" algn="l" defTabSz="914400" rtl="0" eaLnBrk="1" fontAlgn="auto" latinLnBrk="0" hangingPunct="1">
+              <a:lnSpc>
+                <a:spcPct val="100000"/>
+              </a:lnSpc>
+              <a:spcBef>
+                <a:spcPts val="0"/>
+              </a:spcBef>
+              <a:spcAft>
+                <a:spcPts val="0"/>
+              </a:spcAft>
+              <a:buClrTx/>
+              <a:buSzTx/>
+              <a:buFontTx/>
+              <a:buNone/>
+              <a:tabLst/>
+              <a:defRPr/>
+            </a:pPr>
             <a:r>
               <a:rPr lang="en-US" altLang="zh-TW" dirty="0"/>
               <a:t>1dpi</a:t>
@@ -695,7 +746,17 @@
               <a:rPr lang="en-US" altLang="zh-TW" dirty="0"/>
               <a:t>healthy</a:t>
             </a:r>
-            <a:endParaRPr lang="zh-TW" altLang="en-US" dirty="0"/>
+            <a:r>
+              <a:rPr lang="zh-TW" altLang="en-US" dirty="0"/>
+              <a:t> </a:t>
+            </a:r>
+            <a:r>
+              <a:rPr lang="zh-TW" altLang="en-US" dirty="0">
+                <a:sym typeface="Wingdings 2" panose="05020102010507070707" pitchFamily="18" charset="2"/>
+              </a:rPr>
+              <a:t></a:t>
+            </a:r>
+            <a:endParaRPr lang="en-US" altLang="zh-TW" dirty="0"/>
           </a:p>
         </p:txBody>
       </p:sp>
@@ -838,7 +899,15 @@
             </a:r>
             <a:r>
               <a:rPr lang="en-US" altLang="zh-TW" dirty="0"/>
-              <a:t>confounding)</a:t>
+              <a:t>confounding)(</a:t>
+            </a:r>
+            <a:r>
+              <a:rPr lang="zh-TW" altLang="en-US" dirty="0"/>
+              <a:t>不太確定 原始檔案沒有基因的</a:t>
+            </a:r>
+            <a:r>
+              <a:rPr lang="en-US" altLang="zh-TW" dirty="0"/>
+              <a:t>annotation)</a:t>
             </a:r>
             <a:endParaRPr lang="zh-TW" altLang="en-US" dirty="0"/>
           </a:p>
@@ -1564,7 +1633,7 @@
           <a:p>
             <a:fld id="{7E37C305-5696-4A7F-86AE-9C076744B4EA}" type="datetime1">
               <a:rPr lang="zh-TW" altLang="en-US" smtClean="0"/>
-              <a:t>2026/8/6</a:t>
+              <a:t>2026/8/10</a:t>
             </a:fld>
             <a:endParaRPr lang="zh-TW" altLang="en-US"/>
           </a:p>
@@ -1909,7 +1978,7 @@
           <a:p>
             <a:fld id="{3E0432D5-B03D-4717-A904-795F862C1E5D}" type="datetime1">
               <a:rPr lang="zh-TW" altLang="en-US" smtClean="0"/>
-              <a:t>2026/8/6</a:t>
+              <a:t>2026/8/10</a:t>
             </a:fld>
             <a:endParaRPr lang="zh-TW" altLang="en-US"/>
           </a:p>
@@ -2310,7 +2379,7 @@
           <a:p>
             <a:fld id="{2525C8B2-1CA8-4214-9C14-3CAA749726CE}" type="datetime1">
               <a:rPr lang="zh-TW" altLang="en-US" smtClean="0"/>
-              <a:t>2026/8/6</a:t>
+              <a:t>2026/8/10</a:t>
             </a:fld>
             <a:endParaRPr lang="zh-TW" altLang="en-US"/>
           </a:p>
@@ -2646,7 +2715,7 @@
           <a:p>
             <a:fld id="{E78A667E-6D94-4A33-B267-6660FFC03615}" type="datetime1">
               <a:rPr lang="zh-TW" altLang="en-US" smtClean="0"/>
-              <a:t>2026/8/6</a:t>
+              <a:t>2026/8/10</a:t>
             </a:fld>
             <a:endParaRPr lang="zh-TW" altLang="en-US"/>
           </a:p>
@@ -2966,7 +3035,7 @@
           <a:p>
             <a:fld id="{6652C43B-7B97-41B4-A0D9-48858736EFA4}" type="datetime1">
               <a:rPr lang="zh-TW" altLang="en-US" smtClean="0"/>
-              <a:t>2026/8/6</a:t>
+              <a:t>2026/8/10</a:t>
             </a:fld>
             <a:endParaRPr lang="zh-TW" altLang="en-US"/>
           </a:p>
@@ -3362,7 +3431,7 @@
           <a:p>
             <a:fld id="{569EF5B8-0A25-46D3-80D8-0863E07A873E}" type="datetime1">
               <a:rPr lang="zh-TW" altLang="en-US" smtClean="0"/>
-              <a:t>2026/8/6</a:t>
+              <a:t>2026/8/10</a:t>
             </a:fld>
             <a:endParaRPr lang="zh-TW" altLang="en-US"/>
           </a:p>
@@ -3619,7 +3688,7 @@
           <a:p>
             <a:fld id="{07D5B9F2-24E4-479E-A18C-BF8EB1ED4286}" type="datetime1">
               <a:rPr lang="zh-TW" altLang="en-US" smtClean="0"/>
-              <a:t>2026/8/6</a:t>
+              <a:t>2026/8/10</a:t>
             </a:fld>
             <a:endParaRPr lang="zh-TW" altLang="en-US"/>
           </a:p>
@@ -3881,7 +3950,7 @@
           <a:p>
             <a:fld id="{F11E6E13-70FA-486A-9C9C-12B2AF2AEAF1}" type="datetime1">
               <a:rPr lang="zh-TW" altLang="en-US" smtClean="0"/>
-              <a:t>2026/8/6</a:t>
+              <a:t>2026/8/10</a:t>
             </a:fld>
             <a:endParaRPr lang="zh-TW" altLang="en-US"/>
           </a:p>
@@ -4143,7 +4212,7 @@
           <a:p>
             <a:fld id="{BA9150FA-4614-4BF5-8794-75F97A0B2544}" type="datetime1">
               <a:rPr lang="zh-TW" altLang="en-US" smtClean="0"/>
-              <a:t>2026/8/6</a:t>
+              <a:t>2026/8/10</a:t>
             </a:fld>
             <a:endParaRPr lang="zh-TW" altLang="en-US"/>
           </a:p>
@@ -4472,7 +4541,7 @@
           <a:p>
             <a:fld id="{63D336E6-5EE0-4A71-81C3-454B5C7B8BFB}" type="datetime1">
               <a:rPr lang="zh-TW" altLang="en-US" smtClean="0"/>
-              <a:t>2026/8/6</a:t>
+              <a:t>2026/8/10</a:t>
             </a:fld>
             <a:endParaRPr lang="zh-TW" altLang="en-US"/>
           </a:p>
@@ -4795,7 +4864,7 @@
           <a:p>
             <a:fld id="{A477ED53-FC9D-48CB-AA63-3CC0B044F3C0}" type="datetime1">
               <a:rPr lang="zh-TW" altLang="en-US" smtClean="0"/>
-              <a:t>2026/8/6</a:t>
+              <a:t>2026/8/10</a:t>
             </a:fld>
             <a:endParaRPr lang="zh-TW" altLang="en-US"/>
           </a:p>
@@ -5252,7 +5321,7 @@
           <a:p>
             <a:fld id="{F37D8557-2EF5-4AB0-8FDE-59BF801865CC}" type="datetime1">
               <a:rPr lang="zh-TW" altLang="en-US" smtClean="0"/>
-              <a:t>2026/8/6</a:t>
+              <a:t>2026/8/10</a:t>
             </a:fld>
             <a:endParaRPr lang="zh-TW" altLang="en-US"/>
           </a:p>
@@ -5457,7 +5526,7 @@
           <a:p>
             <a:fld id="{3FABEE1F-4E42-4556-91FB-8362A0311142}" type="datetime1">
               <a:rPr lang="zh-TW" altLang="en-US" smtClean="0"/>
-              <a:t>2026/8/6</a:t>
+              <a:t>2026/8/10</a:t>
             </a:fld>
             <a:endParaRPr lang="zh-TW" altLang="en-US"/>
           </a:p>
@@ -5634,7 +5703,7 @@
           <a:p>
             <a:fld id="{24E9E288-AC8B-4B62-B049-7671F3A2DFF0}" type="datetime1">
               <a:rPr lang="zh-TW" altLang="en-US" smtClean="0"/>
-              <a:t>2026/8/6</a:t>
+              <a:t>2026/8/10</a:t>
             </a:fld>
             <a:endParaRPr lang="zh-TW" altLang="en-US"/>
           </a:p>
@@ -5967,7 +6036,7 @@
           <a:p>
             <a:fld id="{90C82A0F-D946-4FC0-8D63-AF5246A679AE}" type="datetime1">
               <a:rPr lang="zh-TW" altLang="en-US" smtClean="0"/>
-              <a:t>2026/8/6</a:t>
+              <a:t>2026/8/10</a:t>
             </a:fld>
             <a:endParaRPr lang="zh-TW" altLang="en-US"/>
           </a:p>
@@ -6312,7 +6381,7 @@
           <a:p>
             <a:fld id="{E61BBE9F-1777-4CD2-896A-5CE0FA3014FF}" type="datetime1">
               <a:rPr lang="zh-TW" altLang="en-US" smtClean="0"/>
-              <a:t>2026/8/6</a:t>
+              <a:t>2026/8/10</a:t>
             </a:fld>
             <a:endParaRPr lang="zh-TW" altLang="en-US"/>
           </a:p>
@@ -8604,7 +8673,7 @@
           <a:p>
             <a:fld id="{A84D7AFE-6A4C-47D2-A958-3F76A70AFF87}" type="datetime1">
               <a:rPr lang="zh-TW" altLang="en-US" smtClean="0"/>
-              <a:t>2026/8/6</a:t>
+              <a:t>2026/8/10</a:t>
             </a:fld>
             <a:endParaRPr lang="zh-TW" altLang="en-US"/>
           </a:p>
